--- a/crates/core/assets/template.pptx
+++ b/crates/core/assets/template.pptx
@@ -552,7 +552,7 @@
               <a:defRPr sz="2400"/>
             </a:pPr>
             <a:r>
-              <a:t>__DEF__</a:t>
+              <a:t>单词释义：__DEF__</a:t>
             </a:r>
           </a:p>
         </p:txBody>
@@ -583,7 +583,7 @@
               <a:defRPr sz="2400"/>
             </a:pPr>
             <a:r>
-              <a:t>__MORPH__</a:t>
+              <a:t>词根词缀：__MORPH__</a:t>
             </a:r>
           </a:p>
         </p:txBody>
@@ -614,7 +614,15 @@
               <a:defRPr sz="2400"/>
             </a:pPr>
             <a:r>
-              <a:t>__EX__</a:t>
+              <a:t>例句：__EXAMPLE__</a:t>
+            </a:r>
+          </a:p>
+          <a:p>
+            <a:pPr algn="l">
+              <a:defRPr sz="2400"/>
+            </a:pPr>
+            <a:r>
+              <a:t>例句释义：__EX_DEF__</a:t>
             </a:r>
           </a:p>
         </p:txBody>
@@ -732,7 +740,7 @@
               <a:defRPr sz="2400"/>
             </a:pPr>
             <a:r>
-              <a:t>__DEF__</a:t>
+              <a:t>单词释义：__DEF__</a:t>
             </a:r>
           </a:p>
         </p:txBody>
@@ -763,7 +771,7 @@
               <a:defRPr sz="2400"/>
             </a:pPr>
             <a:r>
-              <a:t>__MORPH__</a:t>
+              <a:t>词根词缀：__MORPH__</a:t>
             </a:r>
           </a:p>
         </p:txBody>
@@ -794,7 +802,15 @@
               <a:defRPr sz="2400"/>
             </a:pPr>
             <a:r>
-              <a:t>__EX__</a:t>
+              <a:t>例句：__EXAMPLE__</a:t>
+            </a:r>
+          </a:p>
+          <a:p>
+            <a:pPr algn="l">
+              <a:defRPr sz="2400"/>
+            </a:pPr>
+            <a:r>
+              <a:t>例句释义：__EX_DEF__</a:t>
             </a:r>
           </a:p>
         </p:txBody>
@@ -912,7 +928,7 @@
               <a:defRPr sz="2400"/>
             </a:pPr>
             <a:r>
-              <a:t>__DEF__</a:t>
+              <a:t>单词释义：__DEF__</a:t>
             </a:r>
           </a:p>
         </p:txBody>
@@ -943,7 +959,7 @@
               <a:defRPr sz="2400"/>
             </a:pPr>
             <a:r>
-              <a:t>__MORPH__</a:t>
+              <a:t>词根词缀：__MORPH__</a:t>
             </a:r>
           </a:p>
         </p:txBody>
@@ -974,7 +990,15 @@
               <a:defRPr sz="2400"/>
             </a:pPr>
             <a:r>
-              <a:t>__EX__</a:t>
+              <a:t>例句：__EXAMPLE__</a:t>
+            </a:r>
+          </a:p>
+          <a:p>
+            <a:pPr algn="l">
+              <a:defRPr sz="2400"/>
+            </a:pPr>
+            <a:r>
+              <a:t>例句释义：__EX_DEF__</a:t>
             </a:r>
           </a:p>
         </p:txBody>
@@ -1092,7 +1116,7 @@
               <a:defRPr sz="2400"/>
             </a:pPr>
             <a:r>
-              <a:t>__DEF__</a:t>
+              <a:t>单词释义：__DEF__</a:t>
             </a:r>
           </a:p>
         </p:txBody>
@@ -1123,7 +1147,7 @@
               <a:defRPr sz="2400"/>
             </a:pPr>
             <a:r>
-              <a:t>__MORPH__</a:t>
+              <a:t>词根词缀：__MORPH__</a:t>
             </a:r>
           </a:p>
         </p:txBody>
@@ -1154,7 +1178,15 @@
               <a:defRPr sz="2400"/>
             </a:pPr>
             <a:r>
-              <a:t>__EX__</a:t>
+              <a:t>例句：__EXAMPLE__</a:t>
+            </a:r>
+          </a:p>
+          <a:p>
+            <a:pPr algn="l">
+              <a:defRPr sz="2400"/>
+            </a:pPr>
+            <a:r>
+              <a:t>例句释义：__EX_DEF__</a:t>
             </a:r>
           </a:p>
         </p:txBody>
@@ -1272,7 +1304,7 @@
               <a:defRPr sz="2400"/>
             </a:pPr>
             <a:r>
-              <a:t>__DEF__</a:t>
+              <a:t>单词释义：__DEF__</a:t>
             </a:r>
           </a:p>
         </p:txBody>
@@ -1303,7 +1335,7 @@
               <a:defRPr sz="2400"/>
             </a:pPr>
             <a:r>
-              <a:t>__MORPH__</a:t>
+              <a:t>词根词缀：__MORPH__</a:t>
             </a:r>
           </a:p>
         </p:txBody>
@@ -1334,7 +1366,15 @@
               <a:defRPr sz="2400"/>
             </a:pPr>
             <a:r>
-              <a:t>__EX__</a:t>
+              <a:t>例句：__EXAMPLE__</a:t>
+            </a:r>
+          </a:p>
+          <a:p>
+            <a:pPr algn="l">
+              <a:defRPr sz="2400"/>
+            </a:pPr>
+            <a:r>
+              <a:t>例句释义：__EX_DEF__</a:t>
             </a:r>
           </a:p>
         </p:txBody>
